--- a/doc/Automated Emergency Brake.pptx
+++ b/doc/Automated Emergency Brake.pptx
@@ -8,11 +8,12 @@
     <p:sldId id="256" r:id="rId2"/>
     <p:sldId id="257" r:id="rId3"/>
     <p:sldId id="263" r:id="rId4"/>
-    <p:sldId id="258" r:id="rId5"/>
-    <p:sldId id="259" r:id="rId6"/>
-    <p:sldId id="260" r:id="rId7"/>
-    <p:sldId id="261" r:id="rId8"/>
-    <p:sldId id="262" r:id="rId9"/>
+    <p:sldId id="264" r:id="rId5"/>
+    <p:sldId id="258" r:id="rId6"/>
+    <p:sldId id="259" r:id="rId7"/>
+    <p:sldId id="260" r:id="rId8"/>
+    <p:sldId id="261" r:id="rId9"/>
+    <p:sldId id="262" r:id="rId10"/>
   </p:sldIdLst>
   <p:sldSz cx="12192000" cy="6858000"/>
   <p:notesSz cx="6858000" cy="9144000"/>
@@ -295,7 +296,7 @@
             <a:fld id="{5816CF25-28A6-44B7-AA26-A9DDEE15FAB8}" type="datetimeFigureOut">
               <a:rPr lang="hu-HU" smtClean="0"/>
               <a:pPr/>
-              <a:t>2026. 03. 03.</a:t>
+              <a:t>2026. 03. 31.</a:t>
             </a:fld>
             <a:endParaRPr lang="hu-HU"/>
           </a:p>
@@ -545,7 +546,7 @@
             <a:fld id="{5816CF25-28A6-44B7-AA26-A9DDEE15FAB8}" type="datetimeFigureOut">
               <a:rPr lang="hu-HU" smtClean="0"/>
               <a:pPr/>
-              <a:t>2026. 03. 03.</a:t>
+              <a:t>2026. 03. 31.</a:t>
             </a:fld>
             <a:endParaRPr lang="hu-HU"/>
           </a:p>
@@ -829,7 +830,7 @@
             <a:fld id="{5816CF25-28A6-44B7-AA26-A9DDEE15FAB8}" type="datetimeFigureOut">
               <a:rPr lang="hu-HU" smtClean="0"/>
               <a:pPr/>
-              <a:t>2026. 03. 03.</a:t>
+              <a:t>2026. 03. 31.</a:t>
             </a:fld>
             <a:endParaRPr lang="hu-HU" dirty="0"/>
           </a:p>
@@ -1175,7 +1176,7 @@
             <a:fld id="{5816CF25-28A6-44B7-AA26-A9DDEE15FAB8}" type="datetimeFigureOut">
               <a:rPr lang="hu-HU" smtClean="0"/>
               <a:pPr/>
-              <a:t>2026. 03. 03.</a:t>
+              <a:t>2026. 03. 31.</a:t>
             </a:fld>
             <a:endParaRPr lang="hu-HU" dirty="0"/>
           </a:p>
@@ -1333,7 +1334,7 @@
             <a:fld id="{5816CF25-28A6-44B7-AA26-A9DDEE15FAB8}" type="datetimeFigureOut">
               <a:rPr lang="hu-HU" smtClean="0"/>
               <a:pPr/>
-              <a:t>2026. 03. 03.</a:t>
+              <a:t>2026. 03. 31.</a:t>
             </a:fld>
             <a:endParaRPr lang="hu-HU"/>
           </a:p>
@@ -1450,7 +1451,7 @@
             <a:fld id="{5816CF25-28A6-44B7-AA26-A9DDEE15FAB8}" type="datetimeFigureOut">
               <a:rPr lang="hu-HU" smtClean="0"/>
               <a:pPr/>
-              <a:t>2026. 03. 03.</a:t>
+              <a:t>2026. 03. 31.</a:t>
             </a:fld>
             <a:endParaRPr lang="hu-HU"/>
           </a:p>
@@ -1672,7 +1673,7 @@
           <a:p>
             <a:fld id="{5816CF25-28A6-44B7-AA26-A9DDEE15FAB8}" type="datetimeFigureOut">
               <a:rPr lang="hu-HU" smtClean="0"/>
-              <a:t>2026. 03. 03.</a:t>
+              <a:t>2026. 03. 31.</a:t>
             </a:fld>
             <a:endParaRPr lang="hu-HU"/>
           </a:p>
@@ -3136,6 +3137,613 @@
   <p:cSld>
     <p:spTree>
       <p:nvGrpSpPr>
+        <p:cNvPr id="1" name="">
+          <a:extLst>
+            <a:ext uri="{FF2B5EF4-FFF2-40B4-BE49-F238E27FC236}">
+              <a16:creationId xmlns:a16="http://schemas.microsoft.com/office/drawing/2014/main" id="{C6703F66-F796-94FC-B25D-F14BBA6C44DB}"/>
+            </a:ext>
+          </a:extLst>
+        </p:cNvPr>
+        <p:cNvGrpSpPr/>
+        <p:nvPr/>
+      </p:nvGrpSpPr>
+      <p:grpSpPr>
+        <a:xfrm>
+          <a:off x="0" y="0"/>
+          <a:ext cx="0" cy="0"/>
+          <a:chOff x="0" y="0"/>
+          <a:chExt cx="0" cy="0"/>
+        </a:xfrm>
+      </p:grpSpPr>
+      <p:sp>
+        <p:nvSpPr>
+          <p:cNvPr id="2" name="Cím 1">
+            <a:extLst>
+              <a:ext uri="{FF2B5EF4-FFF2-40B4-BE49-F238E27FC236}">
+                <a16:creationId xmlns:a16="http://schemas.microsoft.com/office/drawing/2014/main" id="{40A86D5E-B094-AF43-19B2-74AB818C300D}"/>
+              </a:ext>
+            </a:extLst>
+          </p:cNvPr>
+          <p:cNvSpPr>
+            <a:spLocks noGrp="1"/>
+          </p:cNvSpPr>
+          <p:nvPr>
+            <p:ph type="title"/>
+          </p:nvPr>
+        </p:nvSpPr>
+        <p:spPr/>
+        <p:txBody>
+          <a:bodyPr/>
+          <a:lstStyle/>
+          <a:p>
+            <a:r>
+              <a:rPr lang="hu-HU" dirty="0"/>
+              <a:t>Roadmap</a:t>
+            </a:r>
+            <a:r>
+              <a:rPr lang="en-US" dirty="0"/>
+              <a:t> 2</a:t>
+            </a:r>
+            <a:endParaRPr lang="hu-HU" dirty="0"/>
+          </a:p>
+        </p:txBody>
+      </p:sp>
+      <p:sp>
+        <p:nvSpPr>
+          <p:cNvPr id="3" name="Tartalom helye 2">
+            <a:extLst>
+              <a:ext uri="{FF2B5EF4-FFF2-40B4-BE49-F238E27FC236}">
+                <a16:creationId xmlns:a16="http://schemas.microsoft.com/office/drawing/2014/main" id="{3E682BAB-A63D-0291-1A4D-F34CCCAF3AB2}"/>
+              </a:ext>
+            </a:extLst>
+          </p:cNvPr>
+          <p:cNvSpPr>
+            <a:spLocks noGrp="1"/>
+          </p:cNvSpPr>
+          <p:nvPr>
+            <p:ph idx="1"/>
+          </p:nvPr>
+        </p:nvSpPr>
+        <p:spPr/>
+        <p:txBody>
+          <a:bodyPr>
+            <a:normAutofit fontScale="92500" lnSpcReduction="20000"/>
+          </a:bodyPr>
+          <a:lstStyle/>
+          <a:p>
+            <a:r>
+              <a:rPr lang="hu-HU" dirty="0"/>
+              <a:t>[MS1] </a:t>
+            </a:r>
+            <a:r>
+              <a:rPr lang="hu-HU" dirty="0" err="1"/>
+              <a:t>Create</a:t>
+            </a:r>
+            <a:r>
+              <a:rPr lang="hu-HU" dirty="0"/>
+              <a:t> </a:t>
+            </a:r>
+            <a:r>
+              <a:rPr lang="hu-HU" dirty="0" err="1"/>
+              <a:t>Skeleton</a:t>
+            </a:r>
+            <a:r>
+              <a:rPr lang="hu-HU" dirty="0"/>
+              <a:t> </a:t>
+            </a:r>
+            <a:r>
+              <a:rPr lang="hu-HU" dirty="0" err="1"/>
+              <a:t>Implementation</a:t>
+            </a:r>
+            <a:r>
+              <a:rPr lang="hu-HU" dirty="0"/>
+              <a:t> </a:t>
+            </a:r>
+            <a:r>
+              <a:rPr lang="hu-HU" dirty="0" err="1"/>
+              <a:t>for</a:t>
+            </a:r>
+            <a:r>
+              <a:rPr lang="hu-HU" dirty="0"/>
+              <a:t> </a:t>
+            </a:r>
+            <a:r>
+              <a:rPr lang="hu-HU" dirty="0" err="1"/>
+              <a:t>Packages</a:t>
+            </a:r>
+            <a:r>
+              <a:rPr lang="hu-HU" dirty="0"/>
+              <a:t> (C++)</a:t>
+            </a:r>
+          </a:p>
+          <a:p>
+            <a:pPr lvl="1"/>
+            <a:r>
+              <a:rPr lang="hu-HU" dirty="0" err="1"/>
+              <a:t>DoD</a:t>
+            </a:r>
+            <a:r>
+              <a:rPr lang="hu-HU" dirty="0"/>
+              <a:t>: </a:t>
+            </a:r>
+            <a:r>
+              <a:rPr lang="hu-HU" dirty="0" err="1"/>
+              <a:t>packages</a:t>
+            </a:r>
+            <a:r>
+              <a:rPr lang="hu-HU" dirty="0"/>
+              <a:t>/</a:t>
+            </a:r>
+            <a:r>
+              <a:rPr lang="hu-HU" dirty="0" err="1"/>
+              <a:t>nodes</a:t>
+            </a:r>
+            <a:r>
+              <a:rPr lang="hu-HU" dirty="0"/>
+              <a:t>, </a:t>
+            </a:r>
+            <a:r>
+              <a:rPr lang="hu-HU" dirty="0" err="1"/>
+              <a:t>topic</a:t>
+            </a:r>
+            <a:r>
+              <a:rPr lang="hu-HU" dirty="0"/>
+              <a:t>, </a:t>
+            </a:r>
+            <a:r>
+              <a:rPr lang="hu-HU" dirty="0" err="1"/>
+              <a:t>subscribers</a:t>
+            </a:r>
+            <a:r>
+              <a:rPr lang="hu-HU" dirty="0"/>
+              <a:t>/</a:t>
+            </a:r>
+            <a:r>
+              <a:rPr lang="hu-HU" dirty="0" err="1"/>
+              <a:t>publishers</a:t>
+            </a:r>
+            <a:r>
+              <a:rPr lang="hu-HU" dirty="0"/>
+              <a:t> + </a:t>
+            </a:r>
+            <a:r>
+              <a:rPr lang="hu-HU" dirty="0" err="1"/>
+              <a:t>base</a:t>
+            </a:r>
+            <a:r>
+              <a:rPr lang="hu-HU" dirty="0"/>
+              <a:t> </a:t>
+            </a:r>
+            <a:r>
+              <a:rPr lang="hu-HU" dirty="0" err="1"/>
+              <a:t>node</a:t>
+            </a:r>
+            <a:r>
+              <a:rPr lang="hu-HU" dirty="0"/>
+              <a:t> </a:t>
+            </a:r>
+            <a:r>
+              <a:rPr lang="hu-HU" dirty="0" err="1"/>
+              <a:t>methods</a:t>
+            </a:r>
+            <a:endParaRPr lang="hu-HU" dirty="0"/>
+          </a:p>
+          <a:p>
+            <a:r>
+              <a:rPr lang="hu-HU" dirty="0"/>
+              <a:t>[MS2] </a:t>
+            </a:r>
+            <a:r>
+              <a:rPr lang="hu-HU" dirty="0" err="1"/>
+              <a:t>Implement</a:t>
+            </a:r>
+            <a:r>
+              <a:rPr lang="hu-HU" dirty="0"/>
+              <a:t> </a:t>
+            </a:r>
+            <a:r>
+              <a:rPr lang="hu-HU" dirty="0" err="1"/>
+              <a:t>dummy</a:t>
+            </a:r>
+            <a:r>
+              <a:rPr lang="hu-HU" dirty="0"/>
+              <a:t> </a:t>
+            </a:r>
+            <a:r>
+              <a:rPr lang="hu-HU" dirty="0" err="1"/>
+              <a:t>solution</a:t>
+            </a:r>
+            <a:endParaRPr lang="hu-HU" dirty="0"/>
+          </a:p>
+          <a:p>
+            <a:pPr lvl="1"/>
+            <a:r>
+              <a:rPr lang="hu-HU" dirty="0" err="1"/>
+              <a:t>DoD</a:t>
+            </a:r>
+            <a:r>
+              <a:rPr lang="hu-HU" dirty="0"/>
+              <a:t>: </a:t>
+            </a:r>
+            <a:r>
+              <a:rPr lang="hu-HU" dirty="0" err="1"/>
+              <a:t>Detect</a:t>
+            </a:r>
+            <a:r>
+              <a:rPr lang="hu-HU" dirty="0"/>
+              <a:t> </a:t>
+            </a:r>
+            <a:r>
+              <a:rPr lang="hu-HU" dirty="0" err="1"/>
+              <a:t>critical</a:t>
+            </a:r>
+            <a:r>
+              <a:rPr lang="hu-HU" dirty="0"/>
+              <a:t> </a:t>
+            </a:r>
+            <a:r>
+              <a:rPr lang="hu-HU" dirty="0" err="1"/>
+              <a:t>object</a:t>
+            </a:r>
+            <a:r>
+              <a:rPr lang="hu-HU" dirty="0"/>
+              <a:t> </a:t>
+            </a:r>
+            <a:r>
+              <a:rPr lang="hu-HU" dirty="0" err="1"/>
+              <a:t>within</a:t>
+            </a:r>
+            <a:r>
+              <a:rPr lang="hu-HU" dirty="0"/>
+              <a:t> </a:t>
+            </a:r>
+            <a:r>
+              <a:rPr lang="hu-HU" i="1" dirty="0" err="1"/>
+              <a:t>safety_distance</a:t>
+            </a:r>
+            <a:r>
+              <a:rPr lang="hu-HU" i="1" dirty="0"/>
+              <a:t> </a:t>
+            </a:r>
+            <a:r>
+              <a:rPr lang="hu-HU" dirty="0"/>
+              <a:t>in BP, </a:t>
+            </a:r>
+            <a:r>
+              <a:rPr lang="hu-HU" dirty="0" err="1"/>
+              <a:t>we</a:t>
+            </a:r>
+            <a:r>
+              <a:rPr lang="hu-HU" dirty="0"/>
+              <a:t> </a:t>
+            </a:r>
+            <a:r>
+              <a:rPr lang="hu-HU" dirty="0" err="1"/>
+              <a:t>send</a:t>
+            </a:r>
+            <a:r>
+              <a:rPr lang="hu-HU" dirty="0"/>
+              <a:t> </a:t>
+            </a:r>
+            <a:r>
+              <a:rPr lang="hu-HU" dirty="0" err="1"/>
+              <a:t>the</a:t>
+            </a:r>
+            <a:r>
+              <a:rPr lang="hu-HU" dirty="0"/>
+              <a:t> most </a:t>
+            </a:r>
+            <a:r>
+              <a:rPr lang="hu-HU" dirty="0" err="1"/>
+              <a:t>severe</a:t>
+            </a:r>
+            <a:r>
+              <a:rPr lang="hu-HU" dirty="0"/>
+              <a:t> </a:t>
+            </a:r>
+            <a:r>
+              <a:rPr lang="hu-HU" dirty="0" err="1"/>
+              <a:t>strategy</a:t>
+            </a:r>
+            <a:r>
+              <a:rPr lang="hu-HU" dirty="0"/>
+              <a:t>; </a:t>
+            </a:r>
+            <a:r>
+              <a:rPr lang="hu-HU" dirty="0" err="1"/>
+              <a:t>we</a:t>
+            </a:r>
+            <a:r>
+              <a:rPr lang="hu-HU" dirty="0"/>
+              <a:t> </a:t>
+            </a:r>
+            <a:r>
+              <a:rPr lang="hu-HU" dirty="0" err="1"/>
+              <a:t>construct</a:t>
+            </a:r>
+            <a:r>
+              <a:rPr lang="hu-HU" dirty="0"/>
+              <a:t> a </a:t>
+            </a:r>
+            <a:r>
+              <a:rPr lang="hu-HU" dirty="0" err="1"/>
+              <a:t>binary</a:t>
+            </a:r>
+            <a:r>
+              <a:rPr lang="hu-HU" dirty="0"/>
+              <a:t> </a:t>
+            </a:r>
+            <a:r>
+              <a:rPr lang="hu-HU" dirty="0" err="1"/>
+              <a:t>trajectory</a:t>
+            </a:r>
+            <a:r>
+              <a:rPr lang="hu-HU" dirty="0"/>
+              <a:t> (0) in MP; in </a:t>
+            </a:r>
+            <a:r>
+              <a:rPr lang="hu-HU" dirty="0" err="1"/>
+              <a:t>Control</a:t>
+            </a:r>
+            <a:r>
+              <a:rPr lang="hu-HU" dirty="0"/>
+              <a:t> </a:t>
+            </a:r>
+            <a:r>
+              <a:rPr lang="hu-HU" dirty="0" err="1"/>
+              <a:t>send</a:t>
+            </a:r>
+            <a:r>
+              <a:rPr lang="hu-HU" dirty="0"/>
+              <a:t> </a:t>
+            </a:r>
+            <a:r>
+              <a:rPr lang="hu-HU" dirty="0" err="1"/>
+              <a:t>the</a:t>
+            </a:r>
+            <a:r>
+              <a:rPr lang="hu-HU" dirty="0"/>
+              <a:t> </a:t>
+            </a:r>
+            <a:r>
+              <a:rPr lang="hu-HU" dirty="0" err="1"/>
+              <a:t>first</a:t>
+            </a:r>
+            <a:r>
+              <a:rPr lang="hu-HU" dirty="0"/>
+              <a:t> </a:t>
+            </a:r>
+            <a:r>
+              <a:rPr lang="hu-HU" dirty="0" err="1"/>
+              <a:t>trajectory</a:t>
+            </a:r>
+            <a:r>
+              <a:rPr lang="hu-HU" dirty="0"/>
+              <a:t> </a:t>
+            </a:r>
+            <a:r>
+              <a:rPr lang="hu-HU" dirty="0" err="1"/>
+              <a:t>point</a:t>
+            </a:r>
+            <a:r>
+              <a:rPr lang="hu-HU" dirty="0"/>
+              <a:t> </a:t>
+            </a:r>
+            <a:r>
+              <a:rPr lang="hu-HU" dirty="0" err="1"/>
+              <a:t>velocity</a:t>
+            </a:r>
+            <a:r>
+              <a:rPr lang="hu-HU" dirty="0"/>
+              <a:t> </a:t>
+            </a:r>
+            <a:r>
+              <a:rPr lang="hu-HU" dirty="0" err="1"/>
+              <a:t>to</a:t>
+            </a:r>
+            <a:r>
+              <a:rPr lang="hu-HU" dirty="0"/>
+              <a:t> </a:t>
+            </a:r>
+            <a:r>
+              <a:rPr lang="hu-HU" dirty="0" err="1"/>
+              <a:t>control</a:t>
+            </a:r>
+            <a:r>
+              <a:rPr lang="hu-HU" dirty="0"/>
+              <a:t> </a:t>
+            </a:r>
+            <a:r>
+              <a:rPr lang="hu-HU" dirty="0" err="1"/>
+              <a:t>command</a:t>
+            </a:r>
+            <a:r>
+              <a:rPr lang="hu-HU" dirty="0"/>
+              <a:t>  </a:t>
+            </a:r>
+          </a:p>
+          <a:p>
+            <a:r>
+              <a:rPr lang="hu-HU" dirty="0"/>
+              <a:t>[MS3]</a:t>
+            </a:r>
+            <a:r>
+              <a:rPr lang="en-US" dirty="0"/>
+              <a:t> </a:t>
+            </a:r>
+            <a:r>
+              <a:rPr lang="en-US" dirty="0" err="1"/>
+              <a:t>Polinomial</a:t>
+            </a:r>
+            <a:r>
+              <a:rPr lang="en-US" dirty="0"/>
+              <a:t> trajectory coefficient calculation</a:t>
+            </a:r>
+            <a:endParaRPr lang="hu-HU" dirty="0"/>
+          </a:p>
+          <a:p>
+            <a:pPr lvl="1"/>
+            <a:r>
+              <a:rPr lang="hu-HU" dirty="0"/>
+              <a:t>DoD:</a:t>
+            </a:r>
+            <a:r>
+              <a:rPr lang="en-US" dirty="0"/>
+              <a:t> Time based polynomial coefficients are calculated and maximum acceleration, jerk are calculated </a:t>
+            </a:r>
+          </a:p>
+          <a:p>
+            <a:r>
+              <a:rPr lang="hu-HU" dirty="0"/>
+              <a:t>[MS4] Finalize </a:t>
+            </a:r>
+            <a:r>
+              <a:rPr lang="en-US" dirty="0"/>
+              <a:t>BP, </a:t>
+            </a:r>
+            <a:r>
+              <a:rPr lang="hu-HU" dirty="0"/>
+              <a:t>MP</a:t>
+            </a:r>
+            <a:r>
+              <a:rPr lang="en-US" dirty="0"/>
+              <a:t> and Control</a:t>
+            </a:r>
+            <a:r>
+              <a:rPr lang="hu-HU" dirty="0"/>
+              <a:t> logic according to requirements</a:t>
+            </a:r>
+          </a:p>
+          <a:p>
+            <a:pPr lvl="1"/>
+            <a:r>
+              <a:rPr lang="hu-HU" dirty="0"/>
+              <a:t>DoD: </a:t>
+            </a:r>
+            <a:r>
+              <a:rPr lang="en-US" dirty="0"/>
+              <a:t>Evaluate distance-based trajectory based on time-based coefficients; control logic implementation (+ safety limit jerk &amp; acceleration</a:t>
+            </a:r>
+            <a:r>
+              <a:rPr lang="en-US"/>
+              <a:t>); finalize BP, MP</a:t>
+            </a:r>
+            <a:endParaRPr lang="hu-HU" dirty="0"/>
+          </a:p>
+          <a:p>
+            <a:r>
+              <a:rPr lang="hu-HU" dirty="0"/>
+              <a:t>[MS5] </a:t>
+            </a:r>
+            <a:r>
+              <a:rPr lang="hu-HU" dirty="0" err="1"/>
+              <a:t>Delivery</a:t>
+            </a:r>
+            <a:endParaRPr lang="hu-HU" dirty="0"/>
+          </a:p>
+          <a:p>
+            <a:pPr lvl="1"/>
+            <a:r>
+              <a:rPr lang="hu-HU" dirty="0" err="1"/>
+              <a:t>DoD</a:t>
+            </a:r>
+            <a:r>
+              <a:rPr lang="hu-HU" dirty="0"/>
+              <a:t>: </a:t>
+            </a:r>
+            <a:r>
+              <a:rPr lang="hu-HU" dirty="0" err="1"/>
+              <a:t>Everything</a:t>
+            </a:r>
+            <a:r>
+              <a:rPr lang="hu-HU" dirty="0"/>
+              <a:t> </a:t>
+            </a:r>
+            <a:r>
+              <a:rPr lang="hu-HU" dirty="0" err="1"/>
+              <a:t>works</a:t>
+            </a:r>
+            <a:r>
+              <a:rPr lang="hu-HU" dirty="0"/>
+              <a:t> </a:t>
+            </a:r>
+            <a:r>
+              <a:rPr lang="hu-HU" dirty="0" err="1"/>
+              <a:t>according</a:t>
+            </a:r>
+            <a:r>
+              <a:rPr lang="hu-HU" dirty="0"/>
+              <a:t> </a:t>
+            </a:r>
+            <a:r>
+              <a:rPr lang="hu-HU" dirty="0" err="1"/>
+              <a:t>to</a:t>
+            </a:r>
+            <a:r>
+              <a:rPr lang="hu-HU" dirty="0"/>
+              <a:t> </a:t>
+            </a:r>
+            <a:r>
+              <a:rPr lang="hu-HU" dirty="0" err="1"/>
+              <a:t>the</a:t>
+            </a:r>
+            <a:r>
+              <a:rPr lang="hu-HU" dirty="0"/>
+              <a:t> </a:t>
+            </a:r>
+            <a:r>
+              <a:rPr lang="hu-HU" dirty="0" err="1"/>
+              <a:t>rqmts</a:t>
+            </a:r>
+            <a:r>
+              <a:rPr lang="hu-HU" dirty="0"/>
+              <a:t>, </a:t>
+            </a:r>
+            <a:r>
+              <a:rPr lang="hu-HU" dirty="0" err="1"/>
+              <a:t>the</a:t>
+            </a:r>
+            <a:r>
+              <a:rPr lang="hu-HU" dirty="0"/>
+              <a:t> </a:t>
+            </a:r>
+            <a:r>
+              <a:rPr lang="hu-HU" dirty="0" err="1"/>
+              <a:t>documentation</a:t>
+            </a:r>
+            <a:r>
+              <a:rPr lang="hu-HU" dirty="0"/>
+              <a:t> is </a:t>
+            </a:r>
+            <a:r>
+              <a:rPr lang="hu-HU" dirty="0" err="1"/>
+              <a:t>done</a:t>
+            </a:r>
+            <a:r>
+              <a:rPr lang="hu-HU" dirty="0"/>
+              <a:t>.</a:t>
+            </a:r>
+          </a:p>
+        </p:txBody>
+      </p:sp>
+    </p:spTree>
+    <p:extLst>
+      <p:ext uri="{BB962C8B-B14F-4D97-AF65-F5344CB8AC3E}">
+        <p14:creationId xmlns:p14="http://schemas.microsoft.com/office/powerpoint/2010/main" val="2145756353"/>
+      </p:ext>
+    </p:extLst>
+  </p:cSld>
+  <p:clrMapOvr>
+    <a:masterClrMapping/>
+  </p:clrMapOvr>
+</p:sld>
+</file>
+
+<file path=ppt/slides/slide5.xml><?xml version="1.0" encoding="utf-8"?>
+<p:sld xmlns:a="http://schemas.openxmlformats.org/drawingml/2006/main" xmlns:r="http://schemas.openxmlformats.org/officeDocument/2006/relationships" xmlns:p="http://schemas.openxmlformats.org/presentationml/2006/main">
+  <p:cSld>
+    <p:spTree>
+      <p:nvGrpSpPr>
         <p:cNvPr id="1" name=""/>
         <p:cNvGrpSpPr/>
         <p:nvPr/>
@@ -3295,7 +3903,7 @@
 </p:sld>
 </file>
 
-<file path=ppt/slides/slide5.xml><?xml version="1.0" encoding="utf-8"?>
+<file path=ppt/slides/slide6.xml><?xml version="1.0" encoding="utf-8"?>
 <p:sld xmlns:a="http://schemas.openxmlformats.org/drawingml/2006/main" xmlns:r="http://schemas.openxmlformats.org/officeDocument/2006/relationships" xmlns:p="http://schemas.openxmlformats.org/presentationml/2006/main">
   <p:cSld>
     <p:spTree>
@@ -3379,7 +3987,7 @@
 </p:sld>
 </file>
 
-<file path=ppt/slides/slide6.xml><?xml version="1.0" encoding="utf-8"?>
+<file path=ppt/slides/slide7.xml><?xml version="1.0" encoding="utf-8"?>
 <p:sld xmlns:a="http://schemas.openxmlformats.org/drawingml/2006/main" xmlns:r="http://schemas.openxmlformats.org/officeDocument/2006/relationships" xmlns:p="http://schemas.openxmlformats.org/presentationml/2006/main">
   <p:cSld>
     <p:spTree>
@@ -3501,7 +4109,7 @@
 </p:sld>
 </file>
 
-<file path=ppt/slides/slide7.xml><?xml version="1.0" encoding="utf-8"?>
+<file path=ppt/slides/slide8.xml><?xml version="1.0" encoding="utf-8"?>
 <p:sld xmlns:a="http://schemas.openxmlformats.org/drawingml/2006/main" xmlns:r="http://schemas.openxmlformats.org/officeDocument/2006/relationships" xmlns:p="http://schemas.openxmlformats.org/presentationml/2006/main">
   <p:cSld>
     <p:spTree>
@@ -3639,7 +4247,7 @@
 </p:sld>
 </file>
 
-<file path=ppt/slides/slide8.xml><?xml version="1.0" encoding="utf-8"?>
+<file path=ppt/slides/slide9.xml><?xml version="1.0" encoding="utf-8"?>
 <p:sld xmlns:a="http://schemas.openxmlformats.org/drawingml/2006/main" xmlns:r="http://schemas.openxmlformats.org/officeDocument/2006/relationships" xmlns:p="http://schemas.openxmlformats.org/presentationml/2006/main">
   <p:cSld>
     <p:spTree>
